--- a/中越詩歌/歡欣_Ơn Chúa lòng ghi sâu.pptx
+++ b/中越詩歌/歡欣_Ơn Chúa lòng ghi sâu.pptx
@@ -116,6 +116,11 @@
       </a:defRPr>
     </a:lvl9pPr>
   </p:defaultTextStyle>
+  <p:extLst>
+    <p:ext uri="{EFAFB233-063F-42B5-8137-9DF3F51BA10A}">
+      <p15:sldGuideLst xmlns:p15="http://schemas.microsoft.com/office/powerpoint/2012/main"/>
+    </p:ext>
+  </p:extLst>
 </p:presentation>
 </file>
 
@@ -157,7 +162,7 @@
           <a:lstStyle/>
           <a:p>
             <a:r>
-              <a:rPr lang="en-US" altLang="zh-TW" smtClean="0"/>
+              <a:rPr lang="en-US" altLang="zh-TW"/>
               <a:t>Click to edit Master title style</a:t>
             </a:r>
             <a:endParaRPr lang="zh-TW" altLang="en-US"/>
@@ -276,7 +281,7 @@
           </a:lstStyle>
           <a:p>
             <a:r>
-              <a:rPr lang="en-US" altLang="zh-TW" smtClean="0"/>
+              <a:rPr lang="en-US" altLang="zh-TW"/>
               <a:t>Click to edit Master subtitle style</a:t>
             </a:r>
             <a:endParaRPr lang="zh-TW" altLang="en-US"/>
@@ -300,7 +305,7 @@
           <a:p>
             <a:fld id="{C9A8A38B-3B91-408F-8B88-9A3ADF641235}" type="datetimeFigureOut">
               <a:rPr lang="vi-VN" smtClean="0"/>
-              <a:t>10/02/2021</a:t>
+              <a:t>20/10/2024</a:t>
             </a:fld>
             <a:endParaRPr lang="vi-VN"/>
           </a:p>
@@ -394,7 +399,7 @@
           <a:lstStyle/>
           <a:p>
             <a:r>
-              <a:rPr lang="en-US" altLang="zh-TW" smtClean="0"/>
+              <a:rPr lang="en-US" altLang="zh-TW"/>
               <a:t>Click to edit Master title style</a:t>
             </a:r>
             <a:endParaRPr lang="zh-TW" altLang="en-US"/>
@@ -418,35 +423,35 @@
           <a:p>
             <a:pPr lvl="0"/>
             <a:r>
-              <a:rPr lang="en-US" altLang="zh-TW" smtClean="0"/>
+              <a:rPr lang="en-US" altLang="zh-TW"/>
               <a:t>Edit Master text styles</a:t>
             </a:r>
           </a:p>
           <a:p>
             <a:pPr lvl="1"/>
             <a:r>
-              <a:rPr lang="en-US" altLang="zh-TW" smtClean="0"/>
+              <a:rPr lang="en-US" altLang="zh-TW"/>
               <a:t>Second level</a:t>
             </a:r>
           </a:p>
           <a:p>
             <a:pPr lvl="2"/>
             <a:r>
-              <a:rPr lang="en-US" altLang="zh-TW" smtClean="0"/>
+              <a:rPr lang="en-US" altLang="zh-TW"/>
               <a:t>Third level</a:t>
             </a:r>
           </a:p>
           <a:p>
             <a:pPr lvl="3"/>
             <a:r>
-              <a:rPr lang="en-US" altLang="zh-TW" smtClean="0"/>
+              <a:rPr lang="en-US" altLang="zh-TW"/>
               <a:t>Fourth level</a:t>
             </a:r>
           </a:p>
           <a:p>
             <a:pPr lvl="4"/>
             <a:r>
-              <a:rPr lang="en-US" altLang="zh-TW" smtClean="0"/>
+              <a:rPr lang="en-US" altLang="zh-TW"/>
               <a:t>Fifth level</a:t>
             </a:r>
             <a:endParaRPr lang="zh-TW" altLang="en-US"/>
@@ -470,7 +475,7 @@
           <a:p>
             <a:fld id="{C9A8A38B-3B91-408F-8B88-9A3ADF641235}" type="datetimeFigureOut">
               <a:rPr lang="vi-VN" smtClean="0"/>
-              <a:t>10/02/2021</a:t>
+              <a:t>20/10/2024</a:t>
             </a:fld>
             <a:endParaRPr lang="vi-VN"/>
           </a:p>
@@ -569,7 +574,7 @@
           <a:lstStyle/>
           <a:p>
             <a:r>
-              <a:rPr lang="en-US" altLang="zh-TW" smtClean="0"/>
+              <a:rPr lang="en-US" altLang="zh-TW"/>
               <a:t>Click to edit Master title style</a:t>
             </a:r>
             <a:endParaRPr lang="zh-TW" altLang="en-US"/>
@@ -598,35 +603,35 @@
           <a:p>
             <a:pPr lvl="0"/>
             <a:r>
-              <a:rPr lang="en-US" altLang="zh-TW" smtClean="0"/>
+              <a:rPr lang="en-US" altLang="zh-TW"/>
               <a:t>Edit Master text styles</a:t>
             </a:r>
           </a:p>
           <a:p>
             <a:pPr lvl="1"/>
             <a:r>
-              <a:rPr lang="en-US" altLang="zh-TW" smtClean="0"/>
+              <a:rPr lang="en-US" altLang="zh-TW"/>
               <a:t>Second level</a:t>
             </a:r>
           </a:p>
           <a:p>
             <a:pPr lvl="2"/>
             <a:r>
-              <a:rPr lang="en-US" altLang="zh-TW" smtClean="0"/>
+              <a:rPr lang="en-US" altLang="zh-TW"/>
               <a:t>Third level</a:t>
             </a:r>
           </a:p>
           <a:p>
             <a:pPr lvl="3"/>
             <a:r>
-              <a:rPr lang="en-US" altLang="zh-TW" smtClean="0"/>
+              <a:rPr lang="en-US" altLang="zh-TW"/>
               <a:t>Fourth level</a:t>
             </a:r>
           </a:p>
           <a:p>
             <a:pPr lvl="4"/>
             <a:r>
-              <a:rPr lang="en-US" altLang="zh-TW" smtClean="0"/>
+              <a:rPr lang="en-US" altLang="zh-TW"/>
               <a:t>Fifth level</a:t>
             </a:r>
             <a:endParaRPr lang="zh-TW" altLang="en-US"/>
@@ -650,7 +655,7 @@
           <a:p>
             <a:fld id="{C9A8A38B-3B91-408F-8B88-9A3ADF641235}" type="datetimeFigureOut">
               <a:rPr lang="vi-VN" smtClean="0"/>
-              <a:t>10/02/2021</a:t>
+              <a:t>20/10/2024</a:t>
             </a:fld>
             <a:endParaRPr lang="vi-VN"/>
           </a:p>
@@ -744,7 +749,7 @@
           <a:lstStyle/>
           <a:p>
             <a:r>
-              <a:rPr lang="en-US" altLang="zh-TW" smtClean="0"/>
+              <a:rPr lang="en-US" altLang="zh-TW"/>
               <a:t>Click to edit Master title style</a:t>
             </a:r>
             <a:endParaRPr lang="zh-TW" altLang="en-US"/>
@@ -768,35 +773,35 @@
           <a:p>
             <a:pPr lvl="0"/>
             <a:r>
-              <a:rPr lang="en-US" altLang="zh-TW" smtClean="0"/>
+              <a:rPr lang="en-US" altLang="zh-TW"/>
               <a:t>Edit Master text styles</a:t>
             </a:r>
           </a:p>
           <a:p>
             <a:pPr lvl="1"/>
             <a:r>
-              <a:rPr lang="en-US" altLang="zh-TW" smtClean="0"/>
+              <a:rPr lang="en-US" altLang="zh-TW"/>
               <a:t>Second level</a:t>
             </a:r>
           </a:p>
           <a:p>
             <a:pPr lvl="2"/>
             <a:r>
-              <a:rPr lang="en-US" altLang="zh-TW" smtClean="0"/>
+              <a:rPr lang="en-US" altLang="zh-TW"/>
               <a:t>Third level</a:t>
             </a:r>
           </a:p>
           <a:p>
             <a:pPr lvl="3"/>
             <a:r>
-              <a:rPr lang="en-US" altLang="zh-TW" smtClean="0"/>
+              <a:rPr lang="en-US" altLang="zh-TW"/>
               <a:t>Fourth level</a:t>
             </a:r>
           </a:p>
           <a:p>
             <a:pPr lvl="4"/>
             <a:r>
-              <a:rPr lang="en-US" altLang="zh-TW" smtClean="0"/>
+              <a:rPr lang="en-US" altLang="zh-TW"/>
               <a:t>Fifth level</a:t>
             </a:r>
             <a:endParaRPr lang="zh-TW" altLang="en-US"/>
@@ -820,7 +825,7 @@
           <a:p>
             <a:fld id="{C9A8A38B-3B91-408F-8B88-9A3ADF641235}" type="datetimeFigureOut">
               <a:rPr lang="vi-VN" smtClean="0"/>
-              <a:t>10/02/2021</a:t>
+              <a:t>20/10/2024</a:t>
             </a:fld>
             <a:endParaRPr lang="vi-VN"/>
           </a:p>
@@ -923,7 +928,7 @@
           </a:lstStyle>
           <a:p>
             <a:r>
-              <a:rPr lang="en-US" altLang="zh-TW" smtClean="0"/>
+              <a:rPr lang="en-US" altLang="zh-TW"/>
               <a:t>Click to edit Master title style</a:t>
             </a:r>
             <a:endParaRPr lang="zh-TW" altLang="en-US"/>
@@ -1043,7 +1048,7 @@
           <a:p>
             <a:pPr lvl="0"/>
             <a:r>
-              <a:rPr lang="en-US" altLang="zh-TW" smtClean="0"/>
+              <a:rPr lang="en-US" altLang="zh-TW"/>
               <a:t>Edit Master text styles</a:t>
             </a:r>
           </a:p>
@@ -1066,7 +1071,7 @@
           <a:p>
             <a:fld id="{C9A8A38B-3B91-408F-8B88-9A3ADF641235}" type="datetimeFigureOut">
               <a:rPr lang="vi-VN" smtClean="0"/>
-              <a:t>10/02/2021</a:t>
+              <a:t>20/10/2024</a:t>
             </a:fld>
             <a:endParaRPr lang="vi-VN"/>
           </a:p>
@@ -1160,7 +1165,7 @@
           <a:lstStyle/>
           <a:p>
             <a:r>
-              <a:rPr lang="en-US" altLang="zh-TW" smtClean="0"/>
+              <a:rPr lang="en-US" altLang="zh-TW"/>
               <a:t>Click to edit Master title style</a:t>
             </a:r>
             <a:endParaRPr lang="zh-TW" altLang="en-US"/>
@@ -1217,35 +1222,35 @@
           <a:p>
             <a:pPr lvl="0"/>
             <a:r>
-              <a:rPr lang="en-US" altLang="zh-TW" smtClean="0"/>
+              <a:rPr lang="en-US" altLang="zh-TW"/>
               <a:t>Edit Master text styles</a:t>
             </a:r>
           </a:p>
           <a:p>
             <a:pPr lvl="1"/>
             <a:r>
-              <a:rPr lang="en-US" altLang="zh-TW" smtClean="0"/>
+              <a:rPr lang="en-US" altLang="zh-TW"/>
               <a:t>Second level</a:t>
             </a:r>
           </a:p>
           <a:p>
             <a:pPr lvl="2"/>
             <a:r>
-              <a:rPr lang="en-US" altLang="zh-TW" smtClean="0"/>
+              <a:rPr lang="en-US" altLang="zh-TW"/>
               <a:t>Third level</a:t>
             </a:r>
           </a:p>
           <a:p>
             <a:pPr lvl="3"/>
             <a:r>
-              <a:rPr lang="en-US" altLang="zh-TW" smtClean="0"/>
+              <a:rPr lang="en-US" altLang="zh-TW"/>
               <a:t>Fourth level</a:t>
             </a:r>
           </a:p>
           <a:p>
             <a:pPr lvl="4"/>
             <a:r>
-              <a:rPr lang="en-US" altLang="zh-TW" smtClean="0"/>
+              <a:rPr lang="en-US" altLang="zh-TW"/>
               <a:t>Fifth level</a:t>
             </a:r>
             <a:endParaRPr lang="zh-TW" altLang="en-US"/>
@@ -1302,35 +1307,35 @@
           <a:p>
             <a:pPr lvl="0"/>
             <a:r>
-              <a:rPr lang="en-US" altLang="zh-TW" smtClean="0"/>
+              <a:rPr lang="en-US" altLang="zh-TW"/>
               <a:t>Edit Master text styles</a:t>
             </a:r>
           </a:p>
           <a:p>
             <a:pPr lvl="1"/>
             <a:r>
-              <a:rPr lang="en-US" altLang="zh-TW" smtClean="0"/>
+              <a:rPr lang="en-US" altLang="zh-TW"/>
               <a:t>Second level</a:t>
             </a:r>
           </a:p>
           <a:p>
             <a:pPr lvl="2"/>
             <a:r>
-              <a:rPr lang="en-US" altLang="zh-TW" smtClean="0"/>
+              <a:rPr lang="en-US" altLang="zh-TW"/>
               <a:t>Third level</a:t>
             </a:r>
           </a:p>
           <a:p>
             <a:pPr lvl="3"/>
             <a:r>
-              <a:rPr lang="en-US" altLang="zh-TW" smtClean="0"/>
+              <a:rPr lang="en-US" altLang="zh-TW"/>
               <a:t>Fourth level</a:t>
             </a:r>
           </a:p>
           <a:p>
             <a:pPr lvl="4"/>
             <a:r>
-              <a:rPr lang="en-US" altLang="zh-TW" smtClean="0"/>
+              <a:rPr lang="en-US" altLang="zh-TW"/>
               <a:t>Fifth level</a:t>
             </a:r>
             <a:endParaRPr lang="zh-TW" altLang="en-US"/>
@@ -1354,7 +1359,7 @@
           <a:p>
             <a:fld id="{C9A8A38B-3B91-408F-8B88-9A3ADF641235}" type="datetimeFigureOut">
               <a:rPr lang="vi-VN" smtClean="0"/>
-              <a:t>10/02/2021</a:t>
+              <a:t>20/10/2024</a:t>
             </a:fld>
             <a:endParaRPr lang="vi-VN"/>
           </a:p>
@@ -1452,7 +1457,7 @@
           </a:lstStyle>
           <a:p>
             <a:r>
-              <a:rPr lang="en-US" altLang="zh-TW" smtClean="0"/>
+              <a:rPr lang="en-US" altLang="zh-TW"/>
               <a:t>Click to edit Master title style</a:t>
             </a:r>
             <a:endParaRPr lang="zh-TW" altLang="en-US"/>
@@ -1518,7 +1523,7 @@
           <a:p>
             <a:pPr lvl="0"/>
             <a:r>
-              <a:rPr lang="en-US" altLang="zh-TW" smtClean="0"/>
+              <a:rPr lang="en-US" altLang="zh-TW"/>
               <a:t>Edit Master text styles</a:t>
             </a:r>
           </a:p>
@@ -1574,35 +1579,35 @@
           <a:p>
             <a:pPr lvl="0"/>
             <a:r>
-              <a:rPr lang="en-US" altLang="zh-TW" smtClean="0"/>
+              <a:rPr lang="en-US" altLang="zh-TW"/>
               <a:t>Edit Master text styles</a:t>
             </a:r>
           </a:p>
           <a:p>
             <a:pPr lvl="1"/>
             <a:r>
-              <a:rPr lang="en-US" altLang="zh-TW" smtClean="0"/>
+              <a:rPr lang="en-US" altLang="zh-TW"/>
               <a:t>Second level</a:t>
             </a:r>
           </a:p>
           <a:p>
             <a:pPr lvl="2"/>
             <a:r>
-              <a:rPr lang="en-US" altLang="zh-TW" smtClean="0"/>
+              <a:rPr lang="en-US" altLang="zh-TW"/>
               <a:t>Third level</a:t>
             </a:r>
           </a:p>
           <a:p>
             <a:pPr lvl="3"/>
             <a:r>
-              <a:rPr lang="en-US" altLang="zh-TW" smtClean="0"/>
+              <a:rPr lang="en-US" altLang="zh-TW"/>
               <a:t>Fourth level</a:t>
             </a:r>
           </a:p>
           <a:p>
             <a:pPr lvl="4"/>
             <a:r>
-              <a:rPr lang="en-US" altLang="zh-TW" smtClean="0"/>
+              <a:rPr lang="en-US" altLang="zh-TW"/>
               <a:t>Fifth level</a:t>
             </a:r>
             <a:endParaRPr lang="zh-TW" altLang="en-US"/>
@@ -1668,7 +1673,7 @@
           <a:p>
             <a:pPr lvl="0"/>
             <a:r>
-              <a:rPr lang="en-US" altLang="zh-TW" smtClean="0"/>
+              <a:rPr lang="en-US" altLang="zh-TW"/>
               <a:t>Edit Master text styles</a:t>
             </a:r>
           </a:p>
@@ -1724,35 +1729,35 @@
           <a:p>
             <a:pPr lvl="0"/>
             <a:r>
-              <a:rPr lang="en-US" altLang="zh-TW" smtClean="0"/>
+              <a:rPr lang="en-US" altLang="zh-TW"/>
               <a:t>Edit Master text styles</a:t>
             </a:r>
           </a:p>
           <a:p>
             <a:pPr lvl="1"/>
             <a:r>
-              <a:rPr lang="en-US" altLang="zh-TW" smtClean="0"/>
+              <a:rPr lang="en-US" altLang="zh-TW"/>
               <a:t>Second level</a:t>
             </a:r>
           </a:p>
           <a:p>
             <a:pPr lvl="2"/>
             <a:r>
-              <a:rPr lang="en-US" altLang="zh-TW" smtClean="0"/>
+              <a:rPr lang="en-US" altLang="zh-TW"/>
               <a:t>Third level</a:t>
             </a:r>
           </a:p>
           <a:p>
             <a:pPr lvl="3"/>
             <a:r>
-              <a:rPr lang="en-US" altLang="zh-TW" smtClean="0"/>
+              <a:rPr lang="en-US" altLang="zh-TW"/>
               <a:t>Fourth level</a:t>
             </a:r>
           </a:p>
           <a:p>
             <a:pPr lvl="4"/>
             <a:r>
-              <a:rPr lang="en-US" altLang="zh-TW" smtClean="0"/>
+              <a:rPr lang="en-US" altLang="zh-TW"/>
               <a:t>Fifth level</a:t>
             </a:r>
             <a:endParaRPr lang="zh-TW" altLang="en-US"/>
@@ -1776,7 +1781,7 @@
           <a:p>
             <a:fld id="{C9A8A38B-3B91-408F-8B88-9A3ADF641235}" type="datetimeFigureOut">
               <a:rPr lang="vi-VN" smtClean="0"/>
-              <a:t>10/02/2021</a:t>
+              <a:t>20/10/2024</a:t>
             </a:fld>
             <a:endParaRPr lang="vi-VN"/>
           </a:p>
@@ -1870,7 +1875,7 @@
           <a:lstStyle/>
           <a:p>
             <a:r>
-              <a:rPr lang="en-US" altLang="zh-TW" smtClean="0"/>
+              <a:rPr lang="en-US" altLang="zh-TW"/>
               <a:t>Click to edit Master title style</a:t>
             </a:r>
             <a:endParaRPr lang="zh-TW" altLang="en-US"/>
@@ -1894,7 +1899,7 @@
           <a:p>
             <a:fld id="{C9A8A38B-3B91-408F-8B88-9A3ADF641235}" type="datetimeFigureOut">
               <a:rPr lang="vi-VN" smtClean="0"/>
-              <a:t>10/02/2021</a:t>
+              <a:t>20/10/2024</a:t>
             </a:fld>
             <a:endParaRPr lang="vi-VN"/>
           </a:p>
@@ -1989,7 +1994,7 @@
           <a:p>
             <a:fld id="{C9A8A38B-3B91-408F-8B88-9A3ADF641235}" type="datetimeFigureOut">
               <a:rPr lang="vi-VN" smtClean="0"/>
-              <a:t>10/02/2021</a:t>
+              <a:t>20/10/2024</a:t>
             </a:fld>
             <a:endParaRPr lang="vi-VN"/>
           </a:p>
@@ -2092,7 +2097,7 @@
           </a:lstStyle>
           <a:p>
             <a:r>
-              <a:rPr lang="en-US" altLang="zh-TW" smtClean="0"/>
+              <a:rPr lang="en-US" altLang="zh-TW"/>
               <a:t>Click to edit Master title style</a:t>
             </a:r>
             <a:endParaRPr lang="zh-TW" altLang="en-US"/>
@@ -2149,35 +2154,35 @@
           <a:p>
             <a:pPr lvl="0"/>
             <a:r>
-              <a:rPr lang="en-US" altLang="zh-TW" smtClean="0"/>
+              <a:rPr lang="en-US" altLang="zh-TW"/>
               <a:t>Edit Master text styles</a:t>
             </a:r>
           </a:p>
           <a:p>
             <a:pPr lvl="1"/>
             <a:r>
-              <a:rPr lang="en-US" altLang="zh-TW" smtClean="0"/>
+              <a:rPr lang="en-US" altLang="zh-TW"/>
               <a:t>Second level</a:t>
             </a:r>
           </a:p>
           <a:p>
             <a:pPr lvl="2"/>
             <a:r>
-              <a:rPr lang="en-US" altLang="zh-TW" smtClean="0"/>
+              <a:rPr lang="en-US" altLang="zh-TW"/>
               <a:t>Third level</a:t>
             </a:r>
           </a:p>
           <a:p>
             <a:pPr lvl="3"/>
             <a:r>
-              <a:rPr lang="en-US" altLang="zh-TW" smtClean="0"/>
+              <a:rPr lang="en-US" altLang="zh-TW"/>
               <a:t>Fourth level</a:t>
             </a:r>
           </a:p>
           <a:p>
             <a:pPr lvl="4"/>
             <a:r>
-              <a:rPr lang="en-US" altLang="zh-TW" smtClean="0"/>
+              <a:rPr lang="en-US" altLang="zh-TW"/>
               <a:t>Fifth level</a:t>
             </a:r>
             <a:endParaRPr lang="zh-TW" altLang="en-US"/>
@@ -2243,7 +2248,7 @@
           <a:p>
             <a:pPr lvl="0"/>
             <a:r>
-              <a:rPr lang="en-US" altLang="zh-TW" smtClean="0"/>
+              <a:rPr lang="en-US" altLang="zh-TW"/>
               <a:t>Edit Master text styles</a:t>
             </a:r>
           </a:p>
@@ -2266,7 +2271,7 @@
           <a:p>
             <a:fld id="{C9A8A38B-3B91-408F-8B88-9A3ADF641235}" type="datetimeFigureOut">
               <a:rPr lang="vi-VN" smtClean="0"/>
-              <a:t>10/02/2021</a:t>
+              <a:t>20/10/2024</a:t>
             </a:fld>
             <a:endParaRPr lang="vi-VN"/>
           </a:p>
@@ -2369,7 +2374,7 @@
           </a:lstStyle>
           <a:p>
             <a:r>
-              <a:rPr lang="en-US" altLang="zh-TW" smtClean="0"/>
+              <a:rPr lang="en-US" altLang="zh-TW"/>
               <a:t>Click to edit Master title style</a:t>
             </a:r>
             <a:endParaRPr lang="zh-TW" altLang="en-US"/>
@@ -2434,7 +2439,7 @@
           </a:lstStyle>
           <a:p>
             <a:r>
-              <a:rPr lang="en-US" altLang="zh-TW" smtClean="0"/>
+              <a:rPr lang="en-US" altLang="zh-TW"/>
               <a:t>Click icon to add picture</a:t>
             </a:r>
             <a:endParaRPr lang="zh-TW" altLang="en-US"/>
@@ -2500,7 +2505,7 @@
           <a:p>
             <a:pPr lvl="0"/>
             <a:r>
-              <a:rPr lang="en-US" altLang="zh-TW" smtClean="0"/>
+              <a:rPr lang="en-US" altLang="zh-TW"/>
               <a:t>Edit Master text styles</a:t>
             </a:r>
           </a:p>
@@ -2523,7 +2528,7 @@
           <a:p>
             <a:fld id="{C9A8A38B-3B91-408F-8B88-9A3ADF641235}" type="datetimeFigureOut">
               <a:rPr lang="vi-VN" smtClean="0"/>
-              <a:t>10/02/2021</a:t>
+              <a:t>20/10/2024</a:t>
             </a:fld>
             <a:endParaRPr lang="vi-VN"/>
           </a:p>
@@ -2637,10 +2642,9 @@
           <a:lstStyle/>
           <a:p>
             <a:r>
-              <a:rPr lang="zh-TW" altLang="en-US" smtClean="0"/>
+              <a:rPr lang="zh-TW" altLang="en-US"/>
               <a:t>按一下以編輯母片標題樣式</a:t>
             </a:r>
-            <a:endParaRPr lang="zh-TW" altLang="en-US"/>
           </a:p>
         </p:txBody>
       </p:sp>
@@ -2671,38 +2675,37 @@
           <a:p>
             <a:pPr lvl="0"/>
             <a:r>
-              <a:rPr lang="zh-TW" altLang="en-US" smtClean="0"/>
+              <a:rPr lang="zh-TW" altLang="en-US"/>
               <a:t>按一下以編輯母片文字樣式</a:t>
             </a:r>
           </a:p>
           <a:p>
             <a:pPr lvl="1"/>
             <a:r>
-              <a:rPr lang="zh-TW" altLang="en-US" smtClean="0"/>
+              <a:rPr lang="zh-TW" altLang="en-US"/>
               <a:t>第二層</a:t>
             </a:r>
           </a:p>
           <a:p>
             <a:pPr lvl="2"/>
             <a:r>
-              <a:rPr lang="zh-TW" altLang="en-US" smtClean="0"/>
+              <a:rPr lang="zh-TW" altLang="en-US"/>
               <a:t>第三層</a:t>
             </a:r>
           </a:p>
           <a:p>
             <a:pPr lvl="3"/>
             <a:r>
-              <a:rPr lang="zh-TW" altLang="en-US" smtClean="0"/>
+              <a:rPr lang="zh-TW" altLang="en-US"/>
               <a:t>第四層</a:t>
             </a:r>
           </a:p>
           <a:p>
             <a:pPr lvl="4"/>
             <a:r>
-              <a:rPr lang="zh-TW" altLang="en-US" smtClean="0"/>
+              <a:rPr lang="zh-TW" altLang="en-US"/>
               <a:t>第五層</a:t>
             </a:r>
-            <a:endParaRPr lang="zh-TW" altLang="en-US"/>
           </a:p>
         </p:txBody>
       </p:sp>
@@ -2741,7 +2744,7 @@
           <a:p>
             <a:fld id="{C9A8A38B-3B91-408F-8B88-9A3ADF641235}" type="datetimeFigureOut">
               <a:rPr lang="vi-VN" smtClean="0"/>
-              <a:t>10/02/2021</a:t>
+              <a:t>20/10/2024</a:t>
             </a:fld>
             <a:endParaRPr lang="vi-VN"/>
           </a:p>
@@ -3153,24 +3156,7 @@
                 <a:latin typeface="微軟正黑體" pitchFamily="34" charset="-120"/>
                 <a:ea typeface="微軟正黑體" pitchFamily="34" charset="-120"/>
               </a:rPr>
-              <a:t>歡</a:t>
-            </a:r>
-            <a:r>
-              <a:rPr lang="zh-TW" altLang="en-US" sz="7200" b="1" i="1" dirty="0">
-                <a:solidFill>
-                  <a:srgbClr val="660033"/>
-                </a:solidFill>
-                <a:effectLst>
-                  <a:outerShdw blurRad="38100" dist="38100" dir="2700000" algn="tl">
-                    <a:srgbClr val="000000">
-                      <a:alpha val="43137"/>
-                    </a:srgbClr>
-                  </a:outerShdw>
-                </a:effectLst>
-                <a:latin typeface="微軟正黑體" pitchFamily="34" charset="-120"/>
-                <a:ea typeface="微軟正黑體" pitchFamily="34" charset="-120"/>
-              </a:rPr>
-              <a:t>欣</a:t>
+              <a:t>歡欣</a:t>
             </a:r>
           </a:p>
         </p:txBody>
@@ -4955,14 +4941,6 @@
               </a:rPr>
               <a:t> !</a:t>
             </a:r>
-            <a:endParaRPr lang="en-US" sz="3733" b="1" dirty="0">
-              <a:solidFill>
-                <a:srgbClr val="000066"/>
-              </a:solidFill>
-              <a:latin typeface="Calibri" panose="020F0502020204030204" pitchFamily="34" charset="0"/>
-              <a:ea typeface="微軟正黑體" pitchFamily="34" charset="-120"/>
-              <a:cs typeface="Calibri" panose="020F0502020204030204" pitchFamily="34" charset="0"/>
-            </a:endParaRPr>
           </a:p>
         </p:txBody>
       </p:sp>
@@ -5029,27 +5007,7 @@
                 <a:latin typeface="微軟正黑體" pitchFamily="34" charset="-120"/>
                 <a:ea typeface="微軟正黑體" pitchFamily="34" charset="-120"/>
               </a:rPr>
-              <a:t>歡</a:t>
-            </a:r>
-            <a:r>
-              <a:rPr lang="zh-TW" altLang="en-US" sz="6400" b="1" dirty="0">
-                <a:solidFill>
-                  <a:srgbClr val="660033"/>
-                </a:solidFill>
-                <a:latin typeface="微軟正黑體" pitchFamily="34" charset="-120"/>
-                <a:ea typeface="微軟正黑體" pitchFamily="34" charset="-120"/>
-              </a:rPr>
-              <a:t>欣  心裡感謝</a:t>
-            </a:r>
-            <a:r>
-              <a:rPr lang="zh-TW" altLang="en-US" sz="6400" b="1" dirty="0">
-                <a:solidFill>
-                  <a:srgbClr val="660033"/>
-                </a:solidFill>
-                <a:latin typeface="微軟正黑體" pitchFamily="34" charset="-120"/>
-                <a:ea typeface="微軟正黑體" pitchFamily="34" charset="-120"/>
-              </a:rPr>
-              <a:t>神</a:t>
+              <a:t>歡欣  心裡感謝神</a:t>
             </a:r>
             <a:endParaRPr lang="en-US" altLang="zh-CN" sz="6400" b="1" dirty="0">
               <a:solidFill>
@@ -5407,37 +5365,7 @@
                 <a:latin typeface="微軟正黑體" pitchFamily="34" charset="-120"/>
                 <a:ea typeface="微軟正黑體" pitchFamily="34" charset="-120"/>
               </a:rPr>
-              <a:t>歌唱  歸</a:t>
-            </a:r>
-            <a:r>
-              <a:rPr lang="zh-TW" altLang="en-US" sz="6400" b="1" dirty="0">
-                <a:solidFill>
-                  <a:srgbClr val="660033"/>
-                </a:solidFill>
-                <a:latin typeface="微軟正黑體" pitchFamily="34" charset="-120"/>
-                <a:ea typeface="微軟正黑體" pitchFamily="34" charset="-120"/>
-              </a:rPr>
-              <a:t>於聖</a:t>
-            </a:r>
-            <a:r>
-              <a:rPr lang="zh-TW" altLang="en-US" sz="6400" b="1" dirty="0">
-                <a:solidFill>
-                  <a:srgbClr val="660033"/>
-                </a:solidFill>
-                <a:latin typeface="微軟正黑體" pitchFamily="34" charset="-120"/>
-                <a:ea typeface="微軟正黑體" pitchFamily="34" charset="-120"/>
-              </a:rPr>
-              <a:t>父  讚</a:t>
-            </a:r>
-            <a:r>
-              <a:rPr lang="zh-TW" altLang="en-US" sz="6400" b="1" dirty="0">
-                <a:solidFill>
-                  <a:srgbClr val="660033"/>
-                </a:solidFill>
-                <a:latin typeface="微軟正黑體" pitchFamily="34" charset="-120"/>
-                <a:ea typeface="微軟正黑體" pitchFamily="34" charset="-120"/>
-              </a:rPr>
-              <a:t>頌</a:t>
+              <a:t>歌唱  歸於聖父  讚頌</a:t>
             </a:r>
             <a:endParaRPr lang="en-US" altLang="zh-CN" sz="6400" b="1" dirty="0">
               <a:solidFill>
@@ -5872,7 +5800,7 @@
                 <a:latin typeface="微軟正黑體" pitchFamily="34" charset="-120"/>
                 <a:ea typeface="微軟正黑體" pitchFamily="34" charset="-120"/>
               </a:rPr>
-              <a:t>袮</a:t>
+              <a:t>祢</a:t>
             </a:r>
             <a:r>
               <a:rPr lang="zh-TW" altLang="en-US" sz="6400" b="1" dirty="0">
@@ -5882,17 +5810,7 @@
                 <a:latin typeface="微軟正黑體" pitchFamily="34" charset="-120"/>
                 <a:ea typeface="微軟正黑體" pitchFamily="34" charset="-120"/>
               </a:rPr>
-              <a:t>賜</a:t>
-            </a:r>
-            <a:r>
-              <a:rPr lang="zh-TW" altLang="en-US" sz="6400" b="1" dirty="0">
-                <a:solidFill>
-                  <a:srgbClr val="660033"/>
-                </a:solidFill>
-                <a:latin typeface="微軟正黑體" pitchFamily="34" charset="-120"/>
-                <a:ea typeface="微軟正黑體" pitchFamily="34" charset="-120"/>
-              </a:rPr>
-              <a:t>下慈愛</a:t>
+              <a:t>賜下慈愛</a:t>
             </a:r>
             <a:r>
               <a:rPr lang="en-US" altLang="zh-TW" sz="6400" b="1" dirty="0">
@@ -6106,29 +6024,7 @@
                 <a:ea typeface="微軟正黑體" pitchFamily="34" charset="-120"/>
                 <a:cs typeface="Calibri" panose="020F0502020204030204" pitchFamily="34" charset="0"/>
               </a:rPr>
-              <a:t> </a:t>
-            </a:r>
-            <a:r>
-              <a:rPr lang="en-US" sz="4400" b="1" dirty="0" err="1">
-                <a:solidFill>
-                  <a:srgbClr val="000066"/>
-                </a:solidFill>
-                <a:latin typeface="Calibri" panose="020F0502020204030204" pitchFamily="34" charset="0"/>
-                <a:ea typeface="微軟正黑體" pitchFamily="34" charset="-120"/>
-                <a:cs typeface="Calibri" panose="020F0502020204030204" pitchFamily="34" charset="0"/>
-              </a:rPr>
-              <a:t>bao</a:t>
-            </a:r>
-            <a:r>
-              <a:rPr lang="en-US" sz="4400" b="1" dirty="0">
-                <a:solidFill>
-                  <a:srgbClr val="000066"/>
-                </a:solidFill>
-                <a:latin typeface="Calibri" panose="020F0502020204030204" pitchFamily="34" charset="0"/>
-                <a:ea typeface="微軟正黑體" pitchFamily="34" charset="-120"/>
-                <a:cs typeface="Calibri" panose="020F0502020204030204" pitchFamily="34" charset="0"/>
-              </a:rPr>
-              <a:t> </a:t>
+              <a:t> bao </a:t>
             </a:r>
             <a:r>
               <a:rPr lang="en-US" sz="4400" b="1" dirty="0" err="1">
@@ -6369,27 +6265,7 @@
                 <a:latin typeface="微軟正黑體" pitchFamily="34" charset="-120"/>
                 <a:ea typeface="微軟正黑體" pitchFamily="34" charset="-120"/>
               </a:rPr>
-              <a:t>歡</a:t>
-            </a:r>
-            <a:r>
-              <a:rPr lang="zh-TW" altLang="en-US" sz="6400" b="1" dirty="0">
-                <a:solidFill>
-                  <a:srgbClr val="660033"/>
-                </a:solidFill>
-                <a:latin typeface="微軟正黑體" pitchFamily="34" charset="-120"/>
-                <a:ea typeface="微軟正黑體" pitchFamily="34" charset="-120"/>
-              </a:rPr>
-              <a:t>欣  心裡感謝</a:t>
-            </a:r>
-            <a:r>
-              <a:rPr lang="zh-TW" altLang="en-US" sz="6400" b="1" dirty="0">
-                <a:solidFill>
-                  <a:srgbClr val="660033"/>
-                </a:solidFill>
-                <a:latin typeface="微軟正黑體" pitchFamily="34" charset="-120"/>
-                <a:ea typeface="微軟正黑體" pitchFamily="34" charset="-120"/>
-              </a:rPr>
-              <a:t>神</a:t>
+              <a:t>歡欣  心裡感謝神</a:t>
             </a:r>
             <a:endParaRPr lang="en-US" altLang="zh-CN" sz="6400" b="1" dirty="0">
               <a:solidFill>
@@ -6758,37 +6634,7 @@
                 <a:latin typeface="微軟正黑體" pitchFamily="34" charset="-120"/>
                 <a:ea typeface="微軟正黑體" pitchFamily="34" charset="-120"/>
               </a:rPr>
-              <a:t>歌唱  歸</a:t>
-            </a:r>
-            <a:r>
-              <a:rPr lang="zh-TW" altLang="en-US" sz="6400" b="1" dirty="0">
-                <a:solidFill>
-                  <a:srgbClr val="660033"/>
-                </a:solidFill>
-                <a:latin typeface="微軟正黑體" pitchFamily="34" charset="-120"/>
-                <a:ea typeface="微軟正黑體" pitchFamily="34" charset="-120"/>
-              </a:rPr>
-              <a:t>於聖</a:t>
-            </a:r>
-            <a:r>
-              <a:rPr lang="zh-TW" altLang="en-US" sz="6400" b="1" dirty="0">
-                <a:solidFill>
-                  <a:srgbClr val="660033"/>
-                </a:solidFill>
-                <a:latin typeface="微軟正黑體" pitchFamily="34" charset="-120"/>
-                <a:ea typeface="微軟正黑體" pitchFamily="34" charset="-120"/>
-              </a:rPr>
-              <a:t>父  讚</a:t>
-            </a:r>
-            <a:r>
-              <a:rPr lang="zh-TW" altLang="en-US" sz="6400" b="1" dirty="0">
-                <a:solidFill>
-                  <a:srgbClr val="660033"/>
-                </a:solidFill>
-                <a:latin typeface="微軟正黑體" pitchFamily="34" charset="-120"/>
-                <a:ea typeface="微軟正黑體" pitchFamily="34" charset="-120"/>
-              </a:rPr>
-              <a:t>頌</a:t>
+              <a:t>歌唱  歸於聖父  讚頌</a:t>
             </a:r>
             <a:endParaRPr lang="en-US" altLang="zh-CN" sz="6400" b="1" dirty="0">
               <a:solidFill>
@@ -7201,7 +7047,7 @@
                 <a:latin typeface="微軟正黑體" pitchFamily="34" charset="-120"/>
                 <a:ea typeface="微軟正黑體" pitchFamily="34" charset="-120"/>
               </a:rPr>
-              <a:t>袮</a:t>
+              <a:t>祢</a:t>
             </a:r>
             <a:r>
               <a:rPr lang="zh-TW" altLang="en-US" sz="6400" b="1" dirty="0">
@@ -7211,17 +7057,7 @@
                 <a:latin typeface="微軟正黑體" pitchFamily="34" charset="-120"/>
                 <a:ea typeface="微軟正黑體" pitchFamily="34" charset="-120"/>
               </a:rPr>
-              <a:t>賜</a:t>
-            </a:r>
-            <a:r>
-              <a:rPr lang="zh-TW" altLang="en-US" sz="6400" b="1" dirty="0">
-                <a:solidFill>
-                  <a:srgbClr val="660033"/>
-                </a:solidFill>
-                <a:latin typeface="微軟正黑體" pitchFamily="34" charset="-120"/>
-                <a:ea typeface="微軟正黑體" pitchFamily="34" charset="-120"/>
-              </a:rPr>
-              <a:t>下慈愛</a:t>
+              <a:t>賜下慈愛</a:t>
             </a:r>
             <a:r>
               <a:rPr lang="en-US" altLang="zh-TW" sz="6400" b="1" dirty="0">
